--- a/202610_株式会社くふう住まい御中_LINE公式アカウント運用のご提案.pptx
+++ b/202610_株式会社くふう住まい御中_LINE公式アカウント運用のご提案.pptx
@@ -17,6 +17,7 @@
     <p:sldId id="2990" r:id="rId5"/>
     <p:sldId id="257" r:id="rId6"/>
     <p:sldId id="2992" r:id="rId7"/>
+    <p:sldId id="2995" r:id="rId20"/>
     <p:sldId id="2993" r:id="rId8"/>
     <p:sldId id="2994" r:id="rId9"/>
     <p:sldId id="2956" r:id="rId10"/>
@@ -6107,6 +6108,2409 @@
     <a:masterClrMapping/>
   </p:clrMapOvr>
   <p:transition spd="slow"/>
+</p:sld>
+</file>
+
+<file path=ppt/slides/slide12.xml><?xml version="1.0" encoding="utf-8"?>
+<p:sld xmlns:a="http://schemas.openxmlformats.org/drawingml/2006/main" xmlns:p="http://schemas.openxmlformats.org/presentationml/2006/main" xmlns:r="http://schemas.openxmlformats.org/officeDocument/2006/relationships">
+  <p:cSld>
+    <p:spTree>
+      <p:nvGrpSpPr>
+        <p:cNvPr id="1" name=""/>
+        <p:cNvGrpSpPr/>
+        <p:nvPr/>
+      </p:nvGrpSpPr>
+      <p:grpSpPr/>
+      <p:sp>
+        <p:nvSpPr>
+          <p:cNvPr id="2" name="TextBox 1"/>
+          <p:cNvSpPr txBox="1"/>
+          <p:nvPr/>
+        </p:nvSpPr>
+        <p:spPr>
+          <a:xfrm>
+            <a:off x="547200" y="136800"/>
+            <a:ext cx="8812800" cy="338400"/>
+          </a:xfrm>
+          <a:prstGeom prst="rect">
+            <a:avLst/>
+          </a:prstGeom>
+          <a:noFill/>
+        </p:spPr>
+        <p:txBody>
+          <a:bodyPr wrap="square" lIns="21600" tIns="7200" rIns="21600" bIns="7200" anchor="ctr">
+            <a:spAutoFit/>
+          </a:bodyPr>
+          <a:lstStyle/>
+          <a:p>
+            <a:pPr algn="l"/>
+            <a:r>
+              <a:rPr sz="1600" b="1">
+                <a:solidFill>
+                  <a:srgbClr val="002060"/>
+                </a:solidFill>
+                <a:latin typeface="メイリオ"/>
+                <a:ea typeface="メイリオ"/>
+                <a:cs typeface="メイリオ"/>
+              </a:rPr>
+              <a:t>住宅・不動産領域におけるLINEの活用事例</a:t>
+            </a:r>
+          </a:p>
+        </p:txBody>
+      </p:sp>
+      <p:sp>
+        <p:nvSpPr>
+          <p:cNvPr id="3" name="TextBox 2"/>
+          <p:cNvSpPr txBox="1"/>
+          <p:nvPr/>
+        </p:nvSpPr>
+        <p:spPr>
+          <a:xfrm>
+            <a:off x="547200" y="648000"/>
+            <a:ext cx="8812800" cy="630000"/>
+          </a:xfrm>
+          <a:prstGeom prst="rect">
+            <a:avLst/>
+          </a:prstGeom>
+          <a:noFill/>
+        </p:spPr>
+        <p:txBody>
+          <a:bodyPr wrap="square" lIns="21600" tIns="7200" rIns="21600" bIns="7200" anchor="t">
+            <a:spAutoFit/>
+          </a:bodyPr>
+          <a:lstStyle/>
+          <a:p>
+            <a:pPr algn="l">
+              <a:spcAft>
+                <a:spcPts val="300"/>
+              </a:spcAft>
+            </a:pPr>
+            <a:r>
+              <a:rPr sz="1250" b="1">
+                <a:solidFill>
+                  <a:srgbClr val="333333"/>
+                </a:solidFill>
+                <a:latin typeface="メイリオ"/>
+                <a:ea typeface="メイリオ"/>
+                <a:cs typeface="メイリオ"/>
+              </a:rPr>
+              <a:t>LINEヤフー社が公開している、住宅・不動産領域の活用事例</a:t>
+            </a:r>
+          </a:p>
+        </p:txBody>
+      </p:sp>
+      <p:cxnSp>
+        <p:nvCxnSpPr>
+          <p:cNvPr id="4" name="Connector 3"/>
+          <p:cNvCxnSpPr/>
+          <p:nvPr/>
+        </p:nvCxnSpPr>
+        <p:spPr>
+          <a:xfrm>
+            <a:off x="547200" y="1389600"/>
+            <a:ext cx="8812800" cy="0"/>
+          </a:xfrm>
+          <a:prstGeom prst="line">
+            <a:avLst/>
+          </a:prstGeom>
+          <a:ln w="9525">
+            <a:solidFill>
+              <a:srgbClr val="D9D9D9"/>
+            </a:solidFill>
+          </a:ln>
+        </p:spPr>
+        <p:style>
+          <a:lnRef idx="2">
+            <a:schemeClr val="accent1"/>
+          </a:lnRef>
+          <a:fillRef idx="0">
+            <a:schemeClr val="accent1"/>
+          </a:fillRef>
+          <a:effectRef idx="1">
+            <a:schemeClr val="accent1"/>
+          </a:effectRef>
+          <a:fontRef idx="minor">
+            <a:schemeClr val="tx1"/>
+          </a:fontRef>
+        </p:style>
+      </p:cxnSp>
+      <p:sp>
+        <p:nvSpPr>
+          <p:cNvPr id="5" name="Rounded Rectangle 4"/>
+          <p:cNvSpPr/>
+          <p:nvPr/>
+        </p:nvSpPr>
+        <p:spPr>
+          <a:xfrm>
+            <a:off x="547200" y="1673999"/>
+            <a:ext cx="4298400" cy="1782000"/>
+          </a:xfrm>
+          <a:prstGeom prst="roundRect">
+            <a:avLst>
+              <a:gd name="adj" fmla="val 6000"/>
+            </a:avLst>
+          </a:prstGeom>
+          <a:solidFill>
+            <a:srgbClr val="FFFFFF"/>
+          </a:solidFill>
+          <a:ln w="15240">
+            <a:solidFill>
+              <a:srgbClr val="1F285A"/>
+            </a:solidFill>
+          </a:ln>
+          <a:effectLst/>
+        </p:spPr>
+        <p:style>
+          <a:lnRef idx="1">
+            <a:schemeClr val="accent1"/>
+          </a:lnRef>
+          <a:fillRef idx="3">
+            <a:schemeClr val="accent1"/>
+          </a:fillRef>
+          <a:effectRef idx="2">
+            <a:schemeClr val="accent1"/>
+          </a:effectRef>
+          <a:fontRef idx="minor">
+            <a:schemeClr val="lt1"/>
+          </a:fontRef>
+        </p:style>
+        <p:txBody>
+          <a:bodyPr rtlCol="0" anchor="ctr"/>
+          <a:lstStyle/>
+          <a:p>
+            <a:pPr algn="ctr"/>
+            <a:endParaRPr>
+              <a:latin typeface="メイリオ"/>
+              <a:ea typeface="メイリオ"/>
+              <a:cs typeface="メイリオ"/>
+            </a:endParaRPr>
+          </a:p>
+        </p:txBody>
+      </p:sp>
+      <p:sp>
+        <p:nvSpPr>
+          <p:cNvPr id="6" name="Rounded Rectangle 5"/>
+          <p:cNvSpPr/>
+          <p:nvPr/>
+        </p:nvSpPr>
+        <p:spPr>
+          <a:xfrm>
+            <a:off x="547200" y="1673999"/>
+            <a:ext cx="4298400" cy="378000"/>
+          </a:xfrm>
+          <a:prstGeom prst="roundRect">
+            <a:avLst>
+              <a:gd name="adj" fmla="val 13000"/>
+            </a:avLst>
+          </a:prstGeom>
+          <a:solidFill>
+            <a:srgbClr val="1F285A"/>
+          </a:solidFill>
+          <a:ln>
+            <a:noFill/>
+          </a:ln>
+          <a:effectLst/>
+        </p:spPr>
+        <p:style>
+          <a:lnRef idx="1">
+            <a:schemeClr val="accent1"/>
+          </a:lnRef>
+          <a:fillRef idx="3">
+            <a:schemeClr val="accent1"/>
+          </a:fillRef>
+          <a:effectRef idx="2">
+            <a:schemeClr val="accent1"/>
+          </a:effectRef>
+          <a:fontRef idx="minor">
+            <a:schemeClr val="lt1"/>
+          </a:fontRef>
+        </p:style>
+        <p:txBody>
+          <a:bodyPr rtlCol="0" anchor="ctr"/>
+          <a:lstStyle/>
+          <a:p>
+            <a:pPr algn="ctr"/>
+            <a:endParaRPr>
+              <a:latin typeface="メイリオ"/>
+              <a:ea typeface="メイリオ"/>
+              <a:cs typeface="メイリオ"/>
+            </a:endParaRPr>
+          </a:p>
+        </p:txBody>
+      </p:sp>
+      <p:sp>
+        <p:nvSpPr>
+          <p:cNvPr id="7" name="TextBox 6"/>
+          <p:cNvSpPr txBox="1"/>
+          <p:nvPr/>
+        </p:nvSpPr>
+        <p:spPr>
+          <a:xfrm>
+            <a:off x="691200" y="1673999"/>
+            <a:ext cx="4010399" cy="378000"/>
+          </a:xfrm>
+          <a:prstGeom prst="rect">
+            <a:avLst/>
+          </a:prstGeom>
+          <a:noFill/>
+        </p:spPr>
+        <p:txBody>
+          <a:bodyPr wrap="square" lIns="21600" tIns="7200" rIns="21600" bIns="7200" anchor="ctr">
+            <a:spAutoFit/>
+          </a:bodyPr>
+          <a:lstStyle/>
+          <a:p>
+            <a:pPr algn="l"/>
+            <a:r>
+              <a:rPr sz="1200" b="1">
+                <a:solidFill>
+                  <a:srgbClr val="FFFFFF"/>
+                </a:solidFill>
+                <a:latin typeface="メイリオ"/>
+                <a:ea typeface="メイリオ"/>
+                <a:cs typeface="メイリオ"/>
+              </a:rPr>
+              <a:t>auka（アウカ）</a:t>
+            </a:r>
+          </a:p>
+        </p:txBody>
+      </p:sp>
+      <p:sp>
+        <p:nvSpPr>
+          <p:cNvPr id="8" name="TextBox 7"/>
+          <p:cNvSpPr txBox="1"/>
+          <p:nvPr/>
+        </p:nvSpPr>
+        <p:spPr>
+          <a:xfrm>
+            <a:off x="709200" y="2098799"/>
+            <a:ext cx="3974399" cy="198000"/>
+          </a:xfrm>
+          <a:prstGeom prst="rect">
+            <a:avLst/>
+          </a:prstGeom>
+          <a:noFill/>
+        </p:spPr>
+        <p:txBody>
+          <a:bodyPr wrap="square" lIns="21600" tIns="7200" rIns="21600" bIns="7200" anchor="t">
+            <a:spAutoFit/>
+          </a:bodyPr>
+          <a:lstStyle/>
+          <a:p>
+            <a:pPr algn="l"/>
+            <a:r>
+              <a:rPr sz="950" b="0">
+                <a:solidFill>
+                  <a:srgbClr val="7F7F7F"/>
+                </a:solidFill>
+                <a:latin typeface="メイリオ"/>
+                <a:ea typeface="メイリオ"/>
+                <a:cs typeface="メイリオ"/>
+              </a:rPr>
+              <a:t>株式会社ギバーテイクオール</a:t>
+            </a:r>
+          </a:p>
+        </p:txBody>
+      </p:sp>
+      <p:sp>
+        <p:nvSpPr>
+          <p:cNvPr id="9" name="TextBox 8"/>
+          <p:cNvSpPr txBox="1"/>
+          <p:nvPr/>
+        </p:nvSpPr>
+        <p:spPr>
+          <a:xfrm>
+            <a:off x="709200" y="2321999"/>
+            <a:ext cx="3974399" cy="468000"/>
+          </a:xfrm>
+          <a:prstGeom prst="rect">
+            <a:avLst/>
+          </a:prstGeom>
+          <a:noFill/>
+        </p:spPr>
+        <p:txBody>
+          <a:bodyPr wrap="square" lIns="21600" tIns="7200" rIns="21600" bIns="7200" anchor="t">
+            <a:spAutoFit/>
+          </a:bodyPr>
+          <a:lstStyle/>
+          <a:p>
+            <a:pPr algn="l"/>
+            <a:r>
+              <a:rPr sz="1000" b="0">
+                <a:solidFill>
+                  <a:srgbClr val="333333"/>
+                </a:solidFill>
+                <a:latin typeface="メイリオ"/>
+                <a:ea typeface="メイリオ"/>
+                <a:cs typeface="メイリオ"/>
+              </a:rPr>
+              <a:t>注文住宅の無料相談窓口。LINE広告から友だち追加とアンケートに誘導し、温度感を高めてから電話相談へつなぐ導線。</a:t>
+            </a:r>
+          </a:p>
+        </p:txBody>
+      </p:sp>
+      <p:sp>
+        <p:nvSpPr>
+          <p:cNvPr id="10" name="Rounded Rectangle 9"/>
+          <p:cNvSpPr/>
+          <p:nvPr/>
+        </p:nvSpPr>
+        <p:spPr>
+          <a:xfrm>
+            <a:off x="709200" y="2826000"/>
+            <a:ext cx="1300800" cy="540000"/>
+          </a:xfrm>
+          <a:prstGeom prst="roundRect">
+            <a:avLst>
+              <a:gd name="adj" fmla="val 10000"/>
+            </a:avLst>
+          </a:prstGeom>
+          <a:solidFill>
+            <a:srgbClr val="F4F7FF"/>
+          </a:solidFill>
+          <a:ln>
+            <a:noFill/>
+          </a:ln>
+          <a:effectLst/>
+        </p:spPr>
+        <p:style>
+          <a:lnRef idx="1">
+            <a:schemeClr val="accent1"/>
+          </a:lnRef>
+          <a:fillRef idx="3">
+            <a:schemeClr val="accent1"/>
+          </a:fillRef>
+          <a:effectRef idx="2">
+            <a:schemeClr val="accent1"/>
+          </a:effectRef>
+          <a:fontRef idx="minor">
+            <a:schemeClr val="lt1"/>
+          </a:fontRef>
+        </p:style>
+        <p:txBody>
+          <a:bodyPr rtlCol="0" anchor="ctr"/>
+          <a:lstStyle/>
+          <a:p>
+            <a:pPr algn="ctr"/>
+            <a:endParaRPr>
+              <a:latin typeface="メイリオ"/>
+              <a:ea typeface="メイリオ"/>
+              <a:cs typeface="メイリオ"/>
+            </a:endParaRPr>
+          </a:p>
+        </p:txBody>
+      </p:sp>
+      <p:sp>
+        <p:nvSpPr>
+          <p:cNvPr id="11" name="TextBox 10"/>
+          <p:cNvSpPr txBox="1"/>
+          <p:nvPr/>
+        </p:nvSpPr>
+        <p:spPr>
+          <a:xfrm>
+            <a:off x="745200" y="2880000"/>
+            <a:ext cx="1228800" cy="180000"/>
+          </a:xfrm>
+          <a:prstGeom prst="rect">
+            <a:avLst/>
+          </a:prstGeom>
+          <a:noFill/>
+        </p:spPr>
+        <p:txBody>
+          <a:bodyPr wrap="square" lIns="21600" tIns="7200" rIns="21600" bIns="7200" anchor="t">
+            <a:spAutoFit/>
+          </a:bodyPr>
+          <a:lstStyle/>
+          <a:p>
+            <a:pPr algn="ctr"/>
+            <a:r>
+              <a:rPr sz="900" b="1">
+                <a:solidFill>
+                  <a:srgbClr val="7F7F7F"/>
+                </a:solidFill>
+                <a:latin typeface="メイリオ"/>
+                <a:ea typeface="メイリオ"/>
+                <a:cs typeface="メイリオ"/>
+              </a:rPr>
+              <a:t>CVR</a:t>
+            </a:r>
+          </a:p>
+        </p:txBody>
+      </p:sp>
+      <p:sp>
+        <p:nvSpPr>
+          <p:cNvPr id="12" name="TextBox 11"/>
+          <p:cNvSpPr txBox="1"/>
+          <p:nvPr/>
+        </p:nvSpPr>
+        <p:spPr>
+          <a:xfrm>
+            <a:off x="745200" y="3060000"/>
+            <a:ext cx="1228800" cy="270000"/>
+          </a:xfrm>
+          <a:prstGeom prst="rect">
+            <a:avLst/>
+          </a:prstGeom>
+          <a:noFill/>
+        </p:spPr>
+        <p:txBody>
+          <a:bodyPr wrap="square" lIns="21600" tIns="7200" rIns="21600" bIns="7200" anchor="t">
+            <a:spAutoFit/>
+          </a:bodyPr>
+          <a:lstStyle/>
+          <a:p>
+            <a:pPr algn="ctr"/>
+            <a:r>
+              <a:rPr sz="1150" b="1">
+                <a:solidFill>
+                  <a:srgbClr val="1F285A"/>
+                </a:solidFill>
+                <a:latin typeface="メイリオ"/>
+                <a:ea typeface="メイリオ"/>
+                <a:cs typeface="メイリオ"/>
+              </a:rPr>
+              <a:t>7% → 15%</a:t>
+            </a:r>
+          </a:p>
+        </p:txBody>
+      </p:sp>
+      <p:sp>
+        <p:nvSpPr>
+          <p:cNvPr id="13" name="Rounded Rectangle 12"/>
+          <p:cNvSpPr/>
+          <p:nvPr/>
+        </p:nvSpPr>
+        <p:spPr>
+          <a:xfrm>
+            <a:off x="2046000" y="2826000"/>
+            <a:ext cx="1300800" cy="540000"/>
+          </a:xfrm>
+          <a:prstGeom prst="roundRect">
+            <a:avLst>
+              <a:gd name="adj" fmla="val 10000"/>
+            </a:avLst>
+          </a:prstGeom>
+          <a:solidFill>
+            <a:srgbClr val="F4F7FF"/>
+          </a:solidFill>
+          <a:ln>
+            <a:noFill/>
+          </a:ln>
+          <a:effectLst/>
+        </p:spPr>
+        <p:style>
+          <a:lnRef idx="1">
+            <a:schemeClr val="accent1"/>
+          </a:lnRef>
+          <a:fillRef idx="3">
+            <a:schemeClr val="accent1"/>
+          </a:fillRef>
+          <a:effectRef idx="2">
+            <a:schemeClr val="accent1"/>
+          </a:effectRef>
+          <a:fontRef idx="minor">
+            <a:schemeClr val="lt1"/>
+          </a:fontRef>
+        </p:style>
+        <p:txBody>
+          <a:bodyPr rtlCol="0" anchor="ctr"/>
+          <a:lstStyle/>
+          <a:p>
+            <a:pPr algn="ctr"/>
+            <a:endParaRPr>
+              <a:latin typeface="メイリオ"/>
+              <a:ea typeface="メイリオ"/>
+              <a:cs typeface="メイリオ"/>
+            </a:endParaRPr>
+          </a:p>
+        </p:txBody>
+      </p:sp>
+      <p:sp>
+        <p:nvSpPr>
+          <p:cNvPr id="14" name="TextBox 13"/>
+          <p:cNvSpPr txBox="1"/>
+          <p:nvPr/>
+        </p:nvSpPr>
+        <p:spPr>
+          <a:xfrm>
+            <a:off x="2082000" y="2880000"/>
+            <a:ext cx="1228800" cy="180000"/>
+          </a:xfrm>
+          <a:prstGeom prst="rect">
+            <a:avLst/>
+          </a:prstGeom>
+          <a:noFill/>
+        </p:spPr>
+        <p:txBody>
+          <a:bodyPr wrap="square" lIns="21600" tIns="7200" rIns="21600" bIns="7200" anchor="t">
+            <a:spAutoFit/>
+          </a:bodyPr>
+          <a:lstStyle/>
+          <a:p>
+            <a:pPr algn="ctr"/>
+            <a:r>
+              <a:rPr sz="900" b="1">
+                <a:solidFill>
+                  <a:srgbClr val="7F7F7F"/>
+                </a:solidFill>
+                <a:latin typeface="メイリオ"/>
+                <a:ea typeface="メイリオ"/>
+                <a:cs typeface="メイリオ"/>
+              </a:rPr>
+              <a:t>友だち追加</a:t>
+            </a:r>
+          </a:p>
+        </p:txBody>
+      </p:sp>
+      <p:sp>
+        <p:nvSpPr>
+          <p:cNvPr id="15" name="TextBox 14"/>
+          <p:cNvSpPr txBox="1"/>
+          <p:nvPr/>
+        </p:nvSpPr>
+        <p:spPr>
+          <a:xfrm>
+            <a:off x="2082000" y="3060000"/>
+            <a:ext cx="1228800" cy="270000"/>
+          </a:xfrm>
+          <a:prstGeom prst="rect">
+            <a:avLst/>
+          </a:prstGeom>
+          <a:noFill/>
+        </p:spPr>
+        <p:txBody>
+          <a:bodyPr wrap="square" lIns="21600" tIns="7200" rIns="21600" bIns="7200" anchor="t">
+            <a:spAutoFit/>
+          </a:bodyPr>
+          <a:lstStyle/>
+          <a:p>
+            <a:pPr algn="ctr"/>
+            <a:r>
+              <a:rPr sz="1150" b="1">
+                <a:solidFill>
+                  <a:srgbClr val="1F285A"/>
+                </a:solidFill>
+                <a:latin typeface="メイリオ"/>
+                <a:ea typeface="メイリオ"/>
+                <a:cs typeface="メイリオ"/>
+              </a:rPr>
+              <a:t>約24,000人</a:t>
+            </a:r>
+          </a:p>
+        </p:txBody>
+      </p:sp>
+      <p:sp>
+        <p:nvSpPr>
+          <p:cNvPr id="16" name="Rounded Rectangle 15"/>
+          <p:cNvSpPr/>
+          <p:nvPr/>
+        </p:nvSpPr>
+        <p:spPr>
+          <a:xfrm>
+            <a:off x="3382800" y="2826000"/>
+            <a:ext cx="1300800" cy="540000"/>
+          </a:xfrm>
+          <a:prstGeom prst="roundRect">
+            <a:avLst>
+              <a:gd name="adj" fmla="val 10000"/>
+            </a:avLst>
+          </a:prstGeom>
+          <a:solidFill>
+            <a:srgbClr val="F4F7FF"/>
+          </a:solidFill>
+          <a:ln>
+            <a:noFill/>
+          </a:ln>
+          <a:effectLst/>
+        </p:spPr>
+        <p:style>
+          <a:lnRef idx="1">
+            <a:schemeClr val="accent1"/>
+          </a:lnRef>
+          <a:fillRef idx="3">
+            <a:schemeClr val="accent1"/>
+          </a:fillRef>
+          <a:effectRef idx="2">
+            <a:schemeClr val="accent1"/>
+          </a:effectRef>
+          <a:fontRef idx="minor">
+            <a:schemeClr val="lt1"/>
+          </a:fontRef>
+        </p:style>
+        <p:txBody>
+          <a:bodyPr rtlCol="0" anchor="ctr"/>
+          <a:lstStyle/>
+          <a:p>
+            <a:pPr algn="ctr"/>
+            <a:endParaRPr>
+              <a:latin typeface="メイリオ"/>
+              <a:ea typeface="メイリオ"/>
+              <a:cs typeface="メイリオ"/>
+            </a:endParaRPr>
+          </a:p>
+        </p:txBody>
+      </p:sp>
+      <p:sp>
+        <p:nvSpPr>
+          <p:cNvPr id="17" name="TextBox 16"/>
+          <p:cNvSpPr txBox="1"/>
+          <p:nvPr/>
+        </p:nvSpPr>
+        <p:spPr>
+          <a:xfrm>
+            <a:off x="3418800" y="2880000"/>
+            <a:ext cx="1228800" cy="180000"/>
+          </a:xfrm>
+          <a:prstGeom prst="rect">
+            <a:avLst/>
+          </a:prstGeom>
+          <a:noFill/>
+        </p:spPr>
+        <p:txBody>
+          <a:bodyPr wrap="square" lIns="21600" tIns="7200" rIns="21600" bIns="7200" anchor="t">
+            <a:spAutoFit/>
+          </a:bodyPr>
+          <a:lstStyle/>
+          <a:p>
+            <a:pPr algn="ctr"/>
+            <a:r>
+              <a:rPr sz="900" b="1">
+                <a:solidFill>
+                  <a:srgbClr val="7F7F7F"/>
+                </a:solidFill>
+                <a:latin typeface="メイリオ"/>
+                <a:ea typeface="メイリオ"/>
+                <a:cs typeface="メイリオ"/>
+              </a:rPr>
+              <a:t>全施策のCPA</a:t>
+            </a:r>
+          </a:p>
+        </p:txBody>
+      </p:sp>
+      <p:sp>
+        <p:nvSpPr>
+          <p:cNvPr id="18" name="TextBox 17"/>
+          <p:cNvSpPr txBox="1"/>
+          <p:nvPr/>
+        </p:nvSpPr>
+        <p:spPr>
+          <a:xfrm>
+            <a:off x="3418800" y="3060000"/>
+            <a:ext cx="1228800" cy="270000"/>
+          </a:xfrm>
+          <a:prstGeom prst="rect">
+            <a:avLst/>
+          </a:prstGeom>
+          <a:noFill/>
+        </p:spPr>
+        <p:txBody>
+          <a:bodyPr wrap="square" lIns="21600" tIns="7200" rIns="21600" bIns="7200" anchor="t">
+            <a:spAutoFit/>
+          </a:bodyPr>
+          <a:lstStyle/>
+          <a:p>
+            <a:pPr algn="ctr"/>
+            <a:r>
+              <a:rPr sz="1150" b="1">
+                <a:solidFill>
+                  <a:srgbClr val="1F285A"/>
+                </a:solidFill>
+                <a:latin typeface="メイリオ"/>
+                <a:ea typeface="メイリオ"/>
+                <a:cs typeface="メイリオ"/>
+              </a:rPr>
+              <a:t>3万円を切る</a:t>
+            </a:r>
+          </a:p>
+        </p:txBody>
+      </p:sp>
+      <p:sp>
+        <p:nvSpPr>
+          <p:cNvPr id="19" name="Rounded Rectangle 18"/>
+          <p:cNvSpPr/>
+          <p:nvPr/>
+        </p:nvSpPr>
+        <p:spPr>
+          <a:xfrm>
+            <a:off x="5061600" y="1673999"/>
+            <a:ext cx="4298400" cy="1782000"/>
+          </a:xfrm>
+          <a:prstGeom prst="roundRect">
+            <a:avLst>
+              <a:gd name="adj" fmla="val 6000"/>
+            </a:avLst>
+          </a:prstGeom>
+          <a:solidFill>
+            <a:srgbClr val="FFFFFF"/>
+          </a:solidFill>
+          <a:ln w="15240">
+            <a:solidFill>
+              <a:srgbClr val="1F285A"/>
+            </a:solidFill>
+          </a:ln>
+          <a:effectLst/>
+        </p:spPr>
+        <p:style>
+          <a:lnRef idx="1">
+            <a:schemeClr val="accent1"/>
+          </a:lnRef>
+          <a:fillRef idx="3">
+            <a:schemeClr val="accent1"/>
+          </a:fillRef>
+          <a:effectRef idx="2">
+            <a:schemeClr val="accent1"/>
+          </a:effectRef>
+          <a:fontRef idx="minor">
+            <a:schemeClr val="lt1"/>
+          </a:fontRef>
+        </p:style>
+        <p:txBody>
+          <a:bodyPr rtlCol="0" anchor="ctr"/>
+          <a:lstStyle/>
+          <a:p>
+            <a:pPr algn="ctr"/>
+            <a:endParaRPr>
+              <a:latin typeface="メイリオ"/>
+              <a:ea typeface="メイリオ"/>
+              <a:cs typeface="メイリオ"/>
+            </a:endParaRPr>
+          </a:p>
+        </p:txBody>
+      </p:sp>
+      <p:sp>
+        <p:nvSpPr>
+          <p:cNvPr id="20" name="Rounded Rectangle 19"/>
+          <p:cNvSpPr/>
+          <p:nvPr/>
+        </p:nvSpPr>
+        <p:spPr>
+          <a:xfrm>
+            <a:off x="5061600" y="1673999"/>
+            <a:ext cx="4298400" cy="378000"/>
+          </a:xfrm>
+          <a:prstGeom prst="roundRect">
+            <a:avLst>
+              <a:gd name="adj" fmla="val 13000"/>
+            </a:avLst>
+          </a:prstGeom>
+          <a:solidFill>
+            <a:srgbClr val="1F285A"/>
+          </a:solidFill>
+          <a:ln>
+            <a:noFill/>
+          </a:ln>
+          <a:effectLst/>
+        </p:spPr>
+        <p:style>
+          <a:lnRef idx="1">
+            <a:schemeClr val="accent1"/>
+          </a:lnRef>
+          <a:fillRef idx="3">
+            <a:schemeClr val="accent1"/>
+          </a:fillRef>
+          <a:effectRef idx="2">
+            <a:schemeClr val="accent1"/>
+          </a:effectRef>
+          <a:fontRef idx="minor">
+            <a:schemeClr val="lt1"/>
+          </a:fontRef>
+        </p:style>
+        <p:txBody>
+          <a:bodyPr rtlCol="0" anchor="ctr"/>
+          <a:lstStyle/>
+          <a:p>
+            <a:pPr algn="ctr"/>
+            <a:endParaRPr>
+              <a:latin typeface="メイリオ"/>
+              <a:ea typeface="メイリオ"/>
+              <a:cs typeface="メイリオ"/>
+            </a:endParaRPr>
+          </a:p>
+        </p:txBody>
+      </p:sp>
+      <p:sp>
+        <p:nvSpPr>
+          <p:cNvPr id="21" name="TextBox 20"/>
+          <p:cNvSpPr txBox="1"/>
+          <p:nvPr/>
+        </p:nvSpPr>
+        <p:spPr>
+          <a:xfrm>
+            <a:off x="5205600" y="1673999"/>
+            <a:ext cx="4010399" cy="378000"/>
+          </a:xfrm>
+          <a:prstGeom prst="rect">
+            <a:avLst/>
+          </a:prstGeom>
+          <a:noFill/>
+        </p:spPr>
+        <p:txBody>
+          <a:bodyPr wrap="square" lIns="21600" tIns="7200" rIns="21600" bIns="7200" anchor="ctr">
+            <a:spAutoFit/>
+          </a:bodyPr>
+          <a:lstStyle/>
+          <a:p>
+            <a:pPr algn="l"/>
+            <a:r>
+              <a:rPr sz="1200" b="1">
+                <a:solidFill>
+                  <a:srgbClr val="FFFFFF"/>
+                </a:solidFill>
+                <a:latin typeface="メイリオ"/>
+                <a:ea typeface="メイリオ"/>
+                <a:cs typeface="メイリオ"/>
+              </a:rPr>
+              <a:t>オープンハウスグループ（LINE広告）</a:t>
+            </a:r>
+          </a:p>
+        </p:txBody>
+      </p:sp>
+      <p:sp>
+        <p:nvSpPr>
+          <p:cNvPr id="22" name="TextBox 21"/>
+          <p:cNvSpPr txBox="1"/>
+          <p:nvPr/>
+        </p:nvSpPr>
+        <p:spPr>
+          <a:xfrm>
+            <a:off x="5223599" y="2098799"/>
+            <a:ext cx="3974399" cy="198000"/>
+          </a:xfrm>
+          <a:prstGeom prst="rect">
+            <a:avLst/>
+          </a:prstGeom>
+          <a:noFill/>
+        </p:spPr>
+        <p:txBody>
+          <a:bodyPr wrap="square" lIns="21600" tIns="7200" rIns="21600" bIns="7200" anchor="t">
+            <a:spAutoFit/>
+          </a:bodyPr>
+          <a:lstStyle/>
+          <a:p>
+            <a:pPr algn="l"/>
+            <a:r>
+              <a:rPr sz="950" b="0">
+                <a:solidFill>
+                  <a:srgbClr val="7F7F7F"/>
+                </a:solidFill>
+                <a:latin typeface="メイリオ"/>
+                <a:ea typeface="メイリオ"/>
+                <a:cs typeface="メイリオ"/>
+              </a:rPr>
+              <a:t>株式会社オープンハウスグループ</a:t>
+            </a:r>
+          </a:p>
+        </p:txBody>
+      </p:sp>
+      <p:sp>
+        <p:nvSpPr>
+          <p:cNvPr id="23" name="TextBox 22"/>
+          <p:cNvSpPr txBox="1"/>
+          <p:nvPr/>
+        </p:nvSpPr>
+        <p:spPr>
+          <a:xfrm>
+            <a:off x="5223599" y="2321999"/>
+            <a:ext cx="3974399" cy="468000"/>
+          </a:xfrm>
+          <a:prstGeom prst="rect">
+            <a:avLst/>
+          </a:prstGeom>
+          <a:noFill/>
+        </p:spPr>
+        <p:txBody>
+          <a:bodyPr wrap="square" lIns="21600" tIns="7200" rIns="21600" bIns="7200" anchor="t">
+            <a:spAutoFit/>
+          </a:bodyPr>
+          <a:lstStyle/>
+          <a:p>
+            <a:pPr algn="l"/>
+            <a:r>
+              <a:rPr sz="1000" b="0">
+                <a:solidFill>
+                  <a:srgbClr val="333333"/>
+                </a:solidFill>
+                <a:latin typeface="メイリオ"/>
+                <a:ea typeface="メイリオ"/>
+                <a:cs typeface="メイリオ"/>
+              </a:rPr>
+              <a:t>LINE広告の運用をインハウス化し、エリアごとの顧客データと営業担当の声をクリエイティブに反映。</a:t>
+            </a:r>
+          </a:p>
+        </p:txBody>
+      </p:sp>
+      <p:sp>
+        <p:nvSpPr>
+          <p:cNvPr id="24" name="Rounded Rectangle 23"/>
+          <p:cNvSpPr/>
+          <p:nvPr/>
+        </p:nvSpPr>
+        <p:spPr>
+          <a:xfrm>
+            <a:off x="5223599" y="2826000"/>
+            <a:ext cx="1300800" cy="540000"/>
+          </a:xfrm>
+          <a:prstGeom prst="roundRect">
+            <a:avLst>
+              <a:gd name="adj" fmla="val 10000"/>
+            </a:avLst>
+          </a:prstGeom>
+          <a:solidFill>
+            <a:srgbClr val="F4F7FF"/>
+          </a:solidFill>
+          <a:ln>
+            <a:noFill/>
+          </a:ln>
+          <a:effectLst/>
+        </p:spPr>
+        <p:style>
+          <a:lnRef idx="1">
+            <a:schemeClr val="accent1"/>
+          </a:lnRef>
+          <a:fillRef idx="3">
+            <a:schemeClr val="accent1"/>
+          </a:fillRef>
+          <a:effectRef idx="2">
+            <a:schemeClr val="accent1"/>
+          </a:effectRef>
+          <a:fontRef idx="minor">
+            <a:schemeClr val="lt1"/>
+          </a:fontRef>
+        </p:style>
+        <p:txBody>
+          <a:bodyPr rtlCol="0" anchor="ctr"/>
+          <a:lstStyle/>
+          <a:p>
+            <a:pPr algn="ctr"/>
+            <a:endParaRPr>
+              <a:latin typeface="メイリオ"/>
+              <a:ea typeface="メイリオ"/>
+              <a:cs typeface="メイリオ"/>
+            </a:endParaRPr>
+          </a:p>
+        </p:txBody>
+      </p:sp>
+      <p:sp>
+        <p:nvSpPr>
+          <p:cNvPr id="25" name="TextBox 24"/>
+          <p:cNvSpPr txBox="1"/>
+          <p:nvPr/>
+        </p:nvSpPr>
+        <p:spPr>
+          <a:xfrm>
+            <a:off x="5259599" y="2880000"/>
+            <a:ext cx="1228800" cy="180000"/>
+          </a:xfrm>
+          <a:prstGeom prst="rect">
+            <a:avLst/>
+          </a:prstGeom>
+          <a:noFill/>
+        </p:spPr>
+        <p:txBody>
+          <a:bodyPr wrap="square" lIns="21600" tIns="7200" rIns="21600" bIns="7200" anchor="t">
+            <a:spAutoFit/>
+          </a:bodyPr>
+          <a:lstStyle/>
+          <a:p>
+            <a:pPr algn="ctr"/>
+            <a:r>
+              <a:rPr sz="900" b="1">
+                <a:solidFill>
+                  <a:srgbClr val="7F7F7F"/>
+                </a:solidFill>
+                <a:latin typeface="メイリオ"/>
+                <a:ea typeface="メイリオ"/>
+                <a:cs typeface="メイリオ"/>
+              </a:rPr>
+              <a:t>CVR（前年比）</a:t>
+            </a:r>
+          </a:p>
+        </p:txBody>
+      </p:sp>
+      <p:sp>
+        <p:nvSpPr>
+          <p:cNvPr id="26" name="TextBox 25"/>
+          <p:cNvSpPr txBox="1"/>
+          <p:nvPr/>
+        </p:nvSpPr>
+        <p:spPr>
+          <a:xfrm>
+            <a:off x="5259599" y="3060000"/>
+            <a:ext cx="1228800" cy="270000"/>
+          </a:xfrm>
+          <a:prstGeom prst="rect">
+            <a:avLst/>
+          </a:prstGeom>
+          <a:noFill/>
+        </p:spPr>
+        <p:txBody>
+          <a:bodyPr wrap="square" lIns="21600" tIns="7200" rIns="21600" bIns="7200" anchor="t">
+            <a:spAutoFit/>
+          </a:bodyPr>
+          <a:lstStyle/>
+          <a:p>
+            <a:pPr algn="ctr"/>
+            <a:r>
+              <a:rPr sz="1150" b="1">
+                <a:solidFill>
+                  <a:srgbClr val="1F285A"/>
+                </a:solidFill>
+                <a:latin typeface="メイリオ"/>
+                <a:ea typeface="メイリオ"/>
+                <a:cs typeface="メイリオ"/>
+              </a:rPr>
+              <a:t>158%改善</a:t>
+            </a:r>
+          </a:p>
+        </p:txBody>
+      </p:sp>
+      <p:sp>
+        <p:nvSpPr>
+          <p:cNvPr id="27" name="Rounded Rectangle 26"/>
+          <p:cNvSpPr/>
+          <p:nvPr/>
+        </p:nvSpPr>
+        <p:spPr>
+          <a:xfrm>
+            <a:off x="6560400" y="2826000"/>
+            <a:ext cx="1300800" cy="540000"/>
+          </a:xfrm>
+          <a:prstGeom prst="roundRect">
+            <a:avLst>
+              <a:gd name="adj" fmla="val 10000"/>
+            </a:avLst>
+          </a:prstGeom>
+          <a:solidFill>
+            <a:srgbClr val="F4F7FF"/>
+          </a:solidFill>
+          <a:ln>
+            <a:noFill/>
+          </a:ln>
+          <a:effectLst/>
+        </p:spPr>
+        <p:style>
+          <a:lnRef idx="1">
+            <a:schemeClr val="accent1"/>
+          </a:lnRef>
+          <a:fillRef idx="3">
+            <a:schemeClr val="accent1"/>
+          </a:fillRef>
+          <a:effectRef idx="2">
+            <a:schemeClr val="accent1"/>
+          </a:effectRef>
+          <a:fontRef idx="minor">
+            <a:schemeClr val="lt1"/>
+          </a:fontRef>
+        </p:style>
+        <p:txBody>
+          <a:bodyPr rtlCol="0" anchor="ctr"/>
+          <a:lstStyle/>
+          <a:p>
+            <a:pPr algn="ctr"/>
+            <a:endParaRPr>
+              <a:latin typeface="メイリオ"/>
+              <a:ea typeface="メイリオ"/>
+              <a:cs typeface="メイリオ"/>
+            </a:endParaRPr>
+          </a:p>
+        </p:txBody>
+      </p:sp>
+      <p:sp>
+        <p:nvSpPr>
+          <p:cNvPr id="28" name="TextBox 27"/>
+          <p:cNvSpPr txBox="1"/>
+          <p:nvPr/>
+        </p:nvSpPr>
+        <p:spPr>
+          <a:xfrm>
+            <a:off x="6596400" y="2880000"/>
+            <a:ext cx="1228800" cy="180000"/>
+          </a:xfrm>
+          <a:prstGeom prst="rect">
+            <a:avLst/>
+          </a:prstGeom>
+          <a:noFill/>
+        </p:spPr>
+        <p:txBody>
+          <a:bodyPr wrap="square" lIns="21600" tIns="7200" rIns="21600" bIns="7200" anchor="t">
+            <a:spAutoFit/>
+          </a:bodyPr>
+          <a:lstStyle/>
+          <a:p>
+            <a:pPr algn="ctr"/>
+            <a:r>
+              <a:rPr sz="900" b="1">
+                <a:solidFill>
+                  <a:srgbClr val="7F7F7F"/>
+                </a:solidFill>
+                <a:latin typeface="メイリオ"/>
+                <a:ea typeface="メイリオ"/>
+                <a:cs typeface="メイリオ"/>
+              </a:rPr>
+              <a:t>CPA（前年比）</a:t>
+            </a:r>
+          </a:p>
+        </p:txBody>
+      </p:sp>
+      <p:sp>
+        <p:nvSpPr>
+          <p:cNvPr id="29" name="TextBox 28"/>
+          <p:cNvSpPr txBox="1"/>
+          <p:nvPr/>
+        </p:nvSpPr>
+        <p:spPr>
+          <a:xfrm>
+            <a:off x="6596400" y="3060000"/>
+            <a:ext cx="1228800" cy="270000"/>
+          </a:xfrm>
+          <a:prstGeom prst="rect">
+            <a:avLst/>
+          </a:prstGeom>
+          <a:noFill/>
+        </p:spPr>
+        <p:txBody>
+          <a:bodyPr wrap="square" lIns="21600" tIns="7200" rIns="21600" bIns="7200" anchor="t">
+            <a:spAutoFit/>
+          </a:bodyPr>
+          <a:lstStyle/>
+          <a:p>
+            <a:pPr algn="ctr"/>
+            <a:r>
+              <a:rPr sz="1150" b="1">
+                <a:solidFill>
+                  <a:srgbClr val="1F285A"/>
+                </a:solidFill>
+                <a:latin typeface="メイリオ"/>
+                <a:ea typeface="メイリオ"/>
+                <a:cs typeface="メイリオ"/>
+              </a:rPr>
+              <a:t>68%抑制</a:t>
+            </a:r>
+          </a:p>
+        </p:txBody>
+      </p:sp>
+      <p:sp>
+        <p:nvSpPr>
+          <p:cNvPr id="30" name="Rounded Rectangle 29"/>
+          <p:cNvSpPr/>
+          <p:nvPr/>
+        </p:nvSpPr>
+        <p:spPr>
+          <a:xfrm>
+            <a:off x="7897199" y="2826000"/>
+            <a:ext cx="1300800" cy="540000"/>
+          </a:xfrm>
+          <a:prstGeom prst="roundRect">
+            <a:avLst>
+              <a:gd name="adj" fmla="val 10000"/>
+            </a:avLst>
+          </a:prstGeom>
+          <a:solidFill>
+            <a:srgbClr val="F4F7FF"/>
+          </a:solidFill>
+          <a:ln>
+            <a:noFill/>
+          </a:ln>
+          <a:effectLst/>
+        </p:spPr>
+        <p:style>
+          <a:lnRef idx="1">
+            <a:schemeClr val="accent1"/>
+          </a:lnRef>
+          <a:fillRef idx="3">
+            <a:schemeClr val="accent1"/>
+          </a:fillRef>
+          <a:effectRef idx="2">
+            <a:schemeClr val="accent1"/>
+          </a:effectRef>
+          <a:fontRef idx="minor">
+            <a:schemeClr val="lt1"/>
+          </a:fontRef>
+        </p:style>
+        <p:txBody>
+          <a:bodyPr rtlCol="0" anchor="ctr"/>
+          <a:lstStyle/>
+          <a:p>
+            <a:pPr algn="ctr"/>
+            <a:endParaRPr>
+              <a:latin typeface="メイリオ"/>
+              <a:ea typeface="メイリオ"/>
+              <a:cs typeface="メイリオ"/>
+            </a:endParaRPr>
+          </a:p>
+        </p:txBody>
+      </p:sp>
+      <p:sp>
+        <p:nvSpPr>
+          <p:cNvPr id="31" name="TextBox 30"/>
+          <p:cNvSpPr txBox="1"/>
+          <p:nvPr/>
+        </p:nvSpPr>
+        <p:spPr>
+          <a:xfrm>
+            <a:off x="7933199" y="2880000"/>
+            <a:ext cx="1228800" cy="180000"/>
+          </a:xfrm>
+          <a:prstGeom prst="rect">
+            <a:avLst/>
+          </a:prstGeom>
+          <a:noFill/>
+        </p:spPr>
+        <p:txBody>
+          <a:bodyPr wrap="square" lIns="21600" tIns="7200" rIns="21600" bIns="7200" anchor="t">
+            <a:spAutoFit/>
+          </a:bodyPr>
+          <a:lstStyle/>
+          <a:p>
+            <a:pPr algn="ctr"/>
+            <a:r>
+              <a:rPr sz="900" b="1">
+                <a:solidFill>
+                  <a:srgbClr val="7F7F7F"/>
+                </a:solidFill>
+                <a:latin typeface="メイリオ"/>
+                <a:ea typeface="メイリオ"/>
+                <a:cs typeface="メイリオ"/>
+              </a:rPr>
+              <a:t>資料請求CPA</a:t>
+            </a:r>
+          </a:p>
+        </p:txBody>
+      </p:sp>
+      <p:sp>
+        <p:nvSpPr>
+          <p:cNvPr id="32" name="TextBox 31"/>
+          <p:cNvSpPr txBox="1"/>
+          <p:nvPr/>
+        </p:nvSpPr>
+        <p:spPr>
+          <a:xfrm>
+            <a:off x="7933199" y="3060000"/>
+            <a:ext cx="1228800" cy="270000"/>
+          </a:xfrm>
+          <a:prstGeom prst="rect">
+            <a:avLst/>
+          </a:prstGeom>
+          <a:noFill/>
+        </p:spPr>
+        <p:txBody>
+          <a:bodyPr wrap="square" lIns="21600" tIns="7200" rIns="21600" bIns="7200" anchor="t">
+            <a:spAutoFit/>
+          </a:bodyPr>
+          <a:lstStyle/>
+          <a:p>
+            <a:pPr algn="ctr"/>
+            <a:r>
+              <a:rPr sz="1150" b="1">
+                <a:solidFill>
+                  <a:srgbClr val="1F285A"/>
+                </a:solidFill>
+                <a:latin typeface="メイリオ"/>
+                <a:ea typeface="メイリオ"/>
+                <a:cs typeface="メイリオ"/>
+              </a:rPr>
+              <a:t>82%抑制</a:t>
+            </a:r>
+          </a:p>
+        </p:txBody>
+      </p:sp>
+      <p:sp>
+        <p:nvSpPr>
+          <p:cNvPr id="33" name="Rounded Rectangle 32"/>
+          <p:cNvSpPr/>
+          <p:nvPr/>
+        </p:nvSpPr>
+        <p:spPr>
+          <a:xfrm>
+            <a:off x="547200" y="3600000"/>
+            <a:ext cx="4298400" cy="1782000"/>
+          </a:xfrm>
+          <a:prstGeom prst="roundRect">
+            <a:avLst>
+              <a:gd name="adj" fmla="val 6000"/>
+            </a:avLst>
+          </a:prstGeom>
+          <a:solidFill>
+            <a:srgbClr val="FFFFFF"/>
+          </a:solidFill>
+          <a:ln w="15240">
+            <a:solidFill>
+              <a:srgbClr val="1F285A"/>
+            </a:solidFill>
+          </a:ln>
+          <a:effectLst/>
+        </p:spPr>
+        <p:style>
+          <a:lnRef idx="1">
+            <a:schemeClr val="accent1"/>
+          </a:lnRef>
+          <a:fillRef idx="3">
+            <a:schemeClr val="accent1"/>
+          </a:fillRef>
+          <a:effectRef idx="2">
+            <a:schemeClr val="accent1"/>
+          </a:effectRef>
+          <a:fontRef idx="minor">
+            <a:schemeClr val="lt1"/>
+          </a:fontRef>
+        </p:style>
+        <p:txBody>
+          <a:bodyPr rtlCol="0" anchor="ctr"/>
+          <a:lstStyle/>
+          <a:p>
+            <a:pPr algn="ctr"/>
+            <a:endParaRPr>
+              <a:latin typeface="メイリオ"/>
+              <a:ea typeface="メイリオ"/>
+              <a:cs typeface="メイリオ"/>
+            </a:endParaRPr>
+          </a:p>
+        </p:txBody>
+      </p:sp>
+      <p:sp>
+        <p:nvSpPr>
+          <p:cNvPr id="34" name="Rounded Rectangle 33"/>
+          <p:cNvSpPr/>
+          <p:nvPr/>
+        </p:nvSpPr>
+        <p:spPr>
+          <a:xfrm>
+            <a:off x="547200" y="3600000"/>
+            <a:ext cx="4298400" cy="378000"/>
+          </a:xfrm>
+          <a:prstGeom prst="roundRect">
+            <a:avLst>
+              <a:gd name="adj" fmla="val 13000"/>
+            </a:avLst>
+          </a:prstGeom>
+          <a:solidFill>
+            <a:srgbClr val="1F285A"/>
+          </a:solidFill>
+          <a:ln>
+            <a:noFill/>
+          </a:ln>
+          <a:effectLst/>
+        </p:spPr>
+        <p:style>
+          <a:lnRef idx="1">
+            <a:schemeClr val="accent1"/>
+          </a:lnRef>
+          <a:fillRef idx="3">
+            <a:schemeClr val="accent1"/>
+          </a:fillRef>
+          <a:effectRef idx="2">
+            <a:schemeClr val="accent1"/>
+          </a:effectRef>
+          <a:fontRef idx="minor">
+            <a:schemeClr val="lt1"/>
+          </a:fontRef>
+        </p:style>
+        <p:txBody>
+          <a:bodyPr rtlCol="0" anchor="ctr"/>
+          <a:lstStyle/>
+          <a:p>
+            <a:pPr algn="ctr"/>
+            <a:endParaRPr>
+              <a:latin typeface="メイリオ"/>
+              <a:ea typeface="メイリオ"/>
+              <a:cs typeface="メイリオ"/>
+            </a:endParaRPr>
+          </a:p>
+        </p:txBody>
+      </p:sp>
+      <p:sp>
+        <p:nvSpPr>
+          <p:cNvPr id="35" name="TextBox 34"/>
+          <p:cNvSpPr txBox="1"/>
+          <p:nvPr/>
+        </p:nvSpPr>
+        <p:spPr>
+          <a:xfrm>
+            <a:off x="691200" y="3600000"/>
+            <a:ext cx="4010399" cy="378000"/>
+          </a:xfrm>
+          <a:prstGeom prst="rect">
+            <a:avLst/>
+          </a:prstGeom>
+          <a:noFill/>
+        </p:spPr>
+        <p:txBody>
+          <a:bodyPr wrap="square" lIns="21600" tIns="7200" rIns="21600" bIns="7200" anchor="ctr">
+            <a:spAutoFit/>
+          </a:bodyPr>
+          <a:lstStyle/>
+          <a:p>
+            <a:pPr algn="l"/>
+            <a:r>
+              <a:rPr sz="1200" b="1">
+                <a:solidFill>
+                  <a:srgbClr val="FFFFFF"/>
+                </a:solidFill>
+                <a:latin typeface="メイリオ"/>
+                <a:ea typeface="メイリオ"/>
+                <a:cs typeface="メイリオ"/>
+              </a:rPr>
+              <a:t>LIFULL HOME'S</a:t>
+            </a:r>
+          </a:p>
+        </p:txBody>
+      </p:sp>
+      <p:sp>
+        <p:nvSpPr>
+          <p:cNvPr id="36" name="TextBox 35"/>
+          <p:cNvSpPr txBox="1"/>
+          <p:nvPr/>
+        </p:nvSpPr>
+        <p:spPr>
+          <a:xfrm>
+            <a:off x="709200" y="4024800"/>
+            <a:ext cx="3974399" cy="198000"/>
+          </a:xfrm>
+          <a:prstGeom prst="rect">
+            <a:avLst/>
+          </a:prstGeom>
+          <a:noFill/>
+        </p:spPr>
+        <p:txBody>
+          <a:bodyPr wrap="square" lIns="21600" tIns="7200" rIns="21600" bIns="7200" anchor="t">
+            <a:spAutoFit/>
+          </a:bodyPr>
+          <a:lstStyle/>
+          <a:p>
+            <a:pPr algn="l"/>
+            <a:r>
+              <a:rPr sz="950" b="0">
+                <a:solidFill>
+                  <a:srgbClr val="7F7F7F"/>
+                </a:solidFill>
+                <a:latin typeface="メイリオ"/>
+                <a:ea typeface="メイリオ"/>
+                <a:cs typeface="メイリオ"/>
+              </a:rPr>
+              <a:t>株式会社LIFULL</a:t>
+            </a:r>
+          </a:p>
+        </p:txBody>
+      </p:sp>
+      <p:sp>
+        <p:nvSpPr>
+          <p:cNvPr id="37" name="TextBox 36"/>
+          <p:cNvSpPr txBox="1"/>
+          <p:nvPr/>
+        </p:nvSpPr>
+        <p:spPr>
+          <a:xfrm>
+            <a:off x="709200" y="4248000"/>
+            <a:ext cx="3974399" cy="468000"/>
+          </a:xfrm>
+          <a:prstGeom prst="rect">
+            <a:avLst/>
+          </a:prstGeom>
+          <a:noFill/>
+        </p:spPr>
+        <p:txBody>
+          <a:bodyPr wrap="square" lIns="21600" tIns="7200" rIns="21600" bIns="7200" anchor="t">
+            <a:spAutoFit/>
+          </a:bodyPr>
+          <a:lstStyle/>
+          <a:p>
+            <a:pPr algn="l"/>
+            <a:r>
+              <a:rPr sz="1000" b="0">
+                <a:solidFill>
+                  <a:srgbClr val="333333"/>
+                </a:solidFill>
+                <a:latin typeface="メイリオ"/>
+                <a:ea typeface="メイリオ"/>
+                <a:cs typeface="メイリオ"/>
+              </a:rPr>
+              <a:t>手動配信をステップ配信に置き換え。配信タイミングをABテストし、運用の負荷を下げながら成果を維持。</a:t>
+            </a:r>
+          </a:p>
+        </p:txBody>
+      </p:sp>
+      <p:sp>
+        <p:nvSpPr>
+          <p:cNvPr id="38" name="Rounded Rectangle 37"/>
+          <p:cNvSpPr/>
+          <p:nvPr/>
+        </p:nvSpPr>
+        <p:spPr>
+          <a:xfrm>
+            <a:off x="713232" y="4752000"/>
+            <a:ext cx="1938528" cy="540000"/>
+          </a:xfrm>
+          <a:prstGeom prst="roundRect">
+            <a:avLst>
+              <a:gd name="adj" fmla="val 10000"/>
+            </a:avLst>
+          </a:prstGeom>
+          <a:solidFill>
+            <a:srgbClr val="F4F7FF"/>
+          </a:solidFill>
+          <a:ln>
+            <a:noFill/>
+          </a:ln>
+          <a:effectLst/>
+        </p:spPr>
+        <p:style>
+          <a:lnRef idx="1">
+            <a:schemeClr val="accent1"/>
+          </a:lnRef>
+          <a:fillRef idx="3">
+            <a:schemeClr val="accent1"/>
+          </a:fillRef>
+          <a:effectRef idx="2">
+            <a:schemeClr val="accent1"/>
+          </a:effectRef>
+          <a:fontRef idx="minor">
+            <a:schemeClr val="lt1"/>
+          </a:fontRef>
+        </p:style>
+        <p:txBody>
+          <a:bodyPr rtlCol="0" anchor="ctr"/>
+          <a:lstStyle/>
+          <a:p>
+            <a:pPr algn="ctr"/>
+            <a:endParaRPr>
+              <a:latin typeface="メイリオ"/>
+              <a:ea typeface="メイリオ"/>
+              <a:cs typeface="メイリオ"/>
+            </a:endParaRPr>
+          </a:p>
+        </p:txBody>
+      </p:sp>
+      <p:sp>
+        <p:nvSpPr>
+          <p:cNvPr id="39" name="TextBox 38"/>
+          <p:cNvSpPr txBox="1"/>
+          <p:nvPr/>
+        </p:nvSpPr>
+        <p:spPr>
+          <a:xfrm>
+            <a:off x="749808" y="4806000"/>
+            <a:ext cx="1865376" cy="180000"/>
+          </a:xfrm>
+          <a:prstGeom prst="rect">
+            <a:avLst/>
+          </a:prstGeom>
+          <a:noFill/>
+        </p:spPr>
+        <p:txBody>
+          <a:bodyPr wrap="square" lIns="21600" tIns="7200" rIns="21600" bIns="7200" anchor="t">
+            <a:spAutoFit/>
+          </a:bodyPr>
+          <a:lstStyle/>
+          <a:p>
+            <a:pPr algn="ctr"/>
+            <a:r>
+              <a:rPr sz="900" b="1">
+                <a:solidFill>
+                  <a:srgbClr val="7F7F7F"/>
+                </a:solidFill>
+                <a:latin typeface="メイリオ"/>
+                <a:ea typeface="メイリオ"/>
+                <a:cs typeface="メイリオ"/>
+              </a:rPr>
+              <a:t>CPC</a:t>
+            </a:r>
+          </a:p>
+        </p:txBody>
+      </p:sp>
+      <p:sp>
+        <p:nvSpPr>
+          <p:cNvPr id="40" name="TextBox 39"/>
+          <p:cNvSpPr txBox="1"/>
+          <p:nvPr/>
+        </p:nvSpPr>
+        <p:spPr>
+          <a:xfrm>
+            <a:off x="749808" y="4986000"/>
+            <a:ext cx="1865376" cy="270000"/>
+          </a:xfrm>
+          <a:prstGeom prst="rect">
+            <a:avLst/>
+          </a:prstGeom>
+          <a:noFill/>
+        </p:spPr>
+        <p:txBody>
+          <a:bodyPr wrap="square" lIns="21600" tIns="7200" rIns="21600" bIns="7200" anchor="t">
+            <a:spAutoFit/>
+          </a:bodyPr>
+          <a:lstStyle/>
+          <a:p>
+            <a:pPr algn="ctr"/>
+            <a:r>
+              <a:rPr sz="1150" b="1">
+                <a:solidFill>
+                  <a:srgbClr val="1F285A"/>
+                </a:solidFill>
+                <a:latin typeface="メイリオ"/>
+                <a:ea typeface="メイリオ"/>
+                <a:cs typeface="メイリオ"/>
+              </a:rPr>
+              <a:t>6割改善</a:t>
+            </a:r>
+          </a:p>
+        </p:txBody>
+      </p:sp>
+      <p:sp>
+        <p:nvSpPr>
+          <p:cNvPr id="41" name="Rounded Rectangle 40"/>
+          <p:cNvSpPr/>
+          <p:nvPr/>
+        </p:nvSpPr>
+        <p:spPr>
+          <a:xfrm>
+            <a:off x="2743200" y="4752000"/>
+            <a:ext cx="1938528" cy="540000"/>
+          </a:xfrm>
+          <a:prstGeom prst="roundRect">
+            <a:avLst>
+              <a:gd name="adj" fmla="val 10000"/>
+            </a:avLst>
+          </a:prstGeom>
+          <a:solidFill>
+            <a:srgbClr val="F4F7FF"/>
+          </a:solidFill>
+          <a:ln>
+            <a:noFill/>
+          </a:ln>
+          <a:effectLst/>
+        </p:spPr>
+        <p:style>
+          <a:lnRef idx="1">
+            <a:schemeClr val="accent1"/>
+          </a:lnRef>
+          <a:fillRef idx="3">
+            <a:schemeClr val="accent1"/>
+          </a:fillRef>
+          <a:effectRef idx="2">
+            <a:schemeClr val="accent1"/>
+          </a:effectRef>
+          <a:fontRef idx="minor">
+            <a:schemeClr val="lt1"/>
+          </a:fontRef>
+        </p:style>
+        <p:txBody>
+          <a:bodyPr rtlCol="0" anchor="ctr"/>
+          <a:lstStyle/>
+          <a:p>
+            <a:pPr algn="ctr"/>
+            <a:endParaRPr>
+              <a:latin typeface="メイリオ"/>
+              <a:ea typeface="メイリオ"/>
+              <a:cs typeface="メイリオ"/>
+            </a:endParaRPr>
+          </a:p>
+        </p:txBody>
+      </p:sp>
+      <p:sp>
+        <p:nvSpPr>
+          <p:cNvPr id="42" name="TextBox 41"/>
+          <p:cNvSpPr txBox="1"/>
+          <p:nvPr/>
+        </p:nvSpPr>
+        <p:spPr>
+          <a:xfrm>
+            <a:off x="2779776" y="4806000"/>
+            <a:ext cx="1865376" cy="180000"/>
+          </a:xfrm>
+          <a:prstGeom prst="rect">
+            <a:avLst/>
+          </a:prstGeom>
+          <a:noFill/>
+        </p:spPr>
+        <p:txBody>
+          <a:bodyPr wrap="square" lIns="21600" tIns="7200" rIns="21600" bIns="7200" anchor="t">
+            <a:spAutoFit/>
+          </a:bodyPr>
+          <a:lstStyle/>
+          <a:p>
+            <a:pPr algn="ctr"/>
+            <a:r>
+              <a:rPr sz="900" b="1">
+                <a:solidFill>
+                  <a:srgbClr val="7F7F7F"/>
+                </a:solidFill>
+                <a:latin typeface="メイリオ"/>
+                <a:ea typeface="メイリオ"/>
+                <a:cs typeface="メイリオ"/>
+              </a:rPr>
+              <a:t>運用工数</a:t>
+            </a:r>
+          </a:p>
+        </p:txBody>
+      </p:sp>
+      <p:sp>
+        <p:nvSpPr>
+          <p:cNvPr id="43" name="TextBox 42"/>
+          <p:cNvSpPr txBox="1"/>
+          <p:nvPr/>
+        </p:nvSpPr>
+        <p:spPr>
+          <a:xfrm>
+            <a:off x="2779776" y="4986000"/>
+            <a:ext cx="1865376" cy="270000"/>
+          </a:xfrm>
+          <a:prstGeom prst="rect">
+            <a:avLst/>
+          </a:prstGeom>
+          <a:noFill/>
+        </p:spPr>
+        <p:txBody>
+          <a:bodyPr wrap="square" lIns="21600" tIns="7200" rIns="21600" bIns="7200" anchor="t">
+            <a:spAutoFit/>
+          </a:bodyPr>
+          <a:lstStyle/>
+          <a:p>
+            <a:pPr algn="ctr"/>
+            <a:r>
+              <a:rPr sz="1150" b="1">
+                <a:solidFill>
+                  <a:srgbClr val="1F285A"/>
+                </a:solidFill>
+                <a:latin typeface="メイリオ"/>
+                <a:ea typeface="メイリオ"/>
+                <a:cs typeface="メイリオ"/>
+              </a:rPr>
+              <a:t>1/4に削減</a:t>
+            </a:r>
+          </a:p>
+        </p:txBody>
+      </p:sp>
+      <p:sp>
+        <p:nvSpPr>
+          <p:cNvPr id="47" name="Rounded Rectangle 46"/>
+          <p:cNvSpPr/>
+          <p:nvPr/>
+        </p:nvSpPr>
+        <p:spPr>
+          <a:xfrm>
+            <a:off x="5061600" y="3600000"/>
+            <a:ext cx="4298400" cy="1782000"/>
+          </a:xfrm>
+          <a:prstGeom prst="roundRect">
+            <a:avLst>
+              <a:gd name="adj" fmla="val 6000"/>
+            </a:avLst>
+          </a:prstGeom>
+          <a:solidFill>
+            <a:srgbClr val="FFFFFF"/>
+          </a:solidFill>
+          <a:ln w="15240">
+            <a:solidFill>
+              <a:srgbClr val="1F285A"/>
+            </a:solidFill>
+          </a:ln>
+          <a:effectLst/>
+        </p:spPr>
+        <p:style>
+          <a:lnRef idx="1">
+            <a:schemeClr val="accent1"/>
+          </a:lnRef>
+          <a:fillRef idx="3">
+            <a:schemeClr val="accent1"/>
+          </a:fillRef>
+          <a:effectRef idx="2">
+            <a:schemeClr val="accent1"/>
+          </a:effectRef>
+          <a:fontRef idx="minor">
+            <a:schemeClr val="lt1"/>
+          </a:fontRef>
+        </p:style>
+        <p:txBody>
+          <a:bodyPr rtlCol="0" anchor="ctr"/>
+          <a:lstStyle/>
+          <a:p>
+            <a:pPr algn="ctr"/>
+            <a:endParaRPr>
+              <a:latin typeface="メイリオ"/>
+              <a:ea typeface="メイリオ"/>
+              <a:cs typeface="メイリオ"/>
+            </a:endParaRPr>
+          </a:p>
+        </p:txBody>
+      </p:sp>
+      <p:sp>
+        <p:nvSpPr>
+          <p:cNvPr id="48" name="Rounded Rectangle 47"/>
+          <p:cNvSpPr/>
+          <p:nvPr/>
+        </p:nvSpPr>
+        <p:spPr>
+          <a:xfrm>
+            <a:off x="5061600" y="3600000"/>
+            <a:ext cx="4298400" cy="378000"/>
+          </a:xfrm>
+          <a:prstGeom prst="roundRect">
+            <a:avLst>
+              <a:gd name="adj" fmla="val 13000"/>
+            </a:avLst>
+          </a:prstGeom>
+          <a:solidFill>
+            <a:srgbClr val="1F285A"/>
+          </a:solidFill>
+          <a:ln>
+            <a:noFill/>
+          </a:ln>
+          <a:effectLst/>
+        </p:spPr>
+        <p:style>
+          <a:lnRef idx="1">
+            <a:schemeClr val="accent1"/>
+          </a:lnRef>
+          <a:fillRef idx="3">
+            <a:schemeClr val="accent1"/>
+          </a:fillRef>
+          <a:effectRef idx="2">
+            <a:schemeClr val="accent1"/>
+          </a:effectRef>
+          <a:fontRef idx="minor">
+            <a:schemeClr val="lt1"/>
+          </a:fontRef>
+        </p:style>
+        <p:txBody>
+          <a:bodyPr rtlCol="0" anchor="ctr"/>
+          <a:lstStyle/>
+          <a:p>
+            <a:pPr algn="ctr"/>
+            <a:endParaRPr>
+              <a:latin typeface="メイリオ"/>
+              <a:ea typeface="メイリオ"/>
+              <a:cs typeface="メイリオ"/>
+            </a:endParaRPr>
+          </a:p>
+        </p:txBody>
+      </p:sp>
+      <p:sp>
+        <p:nvSpPr>
+          <p:cNvPr id="49" name="TextBox 48"/>
+          <p:cNvSpPr txBox="1"/>
+          <p:nvPr/>
+        </p:nvSpPr>
+        <p:spPr>
+          <a:xfrm>
+            <a:off x="5205600" y="3600000"/>
+            <a:ext cx="4010399" cy="378000"/>
+          </a:xfrm>
+          <a:prstGeom prst="rect">
+            <a:avLst/>
+          </a:prstGeom>
+          <a:noFill/>
+        </p:spPr>
+        <p:txBody>
+          <a:bodyPr wrap="square" lIns="21600" tIns="7200" rIns="21600" bIns="7200" anchor="ctr">
+            <a:spAutoFit/>
+          </a:bodyPr>
+          <a:lstStyle/>
+          <a:p>
+            <a:pPr algn="l"/>
+            <a:r>
+              <a:rPr sz="1200" b="1">
+                <a:solidFill>
+                  <a:srgbClr val="FFFFFF"/>
+                </a:solidFill>
+                <a:latin typeface="メイリオ"/>
+                <a:ea typeface="メイリオ"/>
+                <a:cs typeface="メイリオ"/>
+              </a:rPr>
+              <a:t>ミサワホーム北越</a:t>
+            </a:r>
+          </a:p>
+        </p:txBody>
+      </p:sp>
+      <p:sp>
+        <p:nvSpPr>
+          <p:cNvPr id="50" name="TextBox 49"/>
+          <p:cNvSpPr txBox="1"/>
+          <p:nvPr/>
+        </p:nvSpPr>
+        <p:spPr>
+          <a:xfrm>
+            <a:off x="5223599" y="4024800"/>
+            <a:ext cx="3974399" cy="198000"/>
+          </a:xfrm>
+          <a:prstGeom prst="rect">
+            <a:avLst/>
+          </a:prstGeom>
+          <a:noFill/>
+        </p:spPr>
+        <p:txBody>
+          <a:bodyPr wrap="square" lIns="21600" tIns="7200" rIns="21600" bIns="7200" anchor="t">
+            <a:spAutoFit/>
+          </a:bodyPr>
+          <a:lstStyle/>
+          <a:p>
+            <a:pPr algn="l"/>
+            <a:r>
+              <a:rPr sz="950" b="0">
+                <a:solidFill>
+                  <a:srgbClr val="7F7F7F"/>
+                </a:solidFill>
+                <a:latin typeface="メイリオ"/>
+                <a:ea typeface="メイリオ"/>
+                <a:cs typeface="メイリオ"/>
+              </a:rPr>
+              <a:t>ミサワホーム北越株式会社</a:t>
+            </a:r>
+          </a:p>
+        </p:txBody>
+      </p:sp>
+      <p:sp>
+        <p:nvSpPr>
+          <p:cNvPr id="51" name="TextBox 50"/>
+          <p:cNvSpPr txBox="1"/>
+          <p:nvPr/>
+        </p:nvSpPr>
+        <p:spPr>
+          <a:xfrm>
+            <a:off x="5223599" y="4248000"/>
+            <a:ext cx="3974399" cy="468000"/>
+          </a:xfrm>
+          <a:prstGeom prst="rect">
+            <a:avLst/>
+          </a:prstGeom>
+          <a:noFill/>
+        </p:spPr>
+        <p:txBody>
+          <a:bodyPr wrap="square" lIns="21600" tIns="7200" rIns="21600" bIns="7200" anchor="t">
+            <a:spAutoFit/>
+          </a:bodyPr>
+          <a:lstStyle/>
+          <a:p>
+            <a:pPr algn="l"/>
+            <a:r>
+              <a:rPr sz="1000" b="0">
+                <a:solidFill>
+                  <a:srgbClr val="333333"/>
+                </a:solidFill>
+                <a:latin typeface="メイリオ"/>
+                <a:ea typeface="メイリオ"/>
+                <a:cs typeface="メイリオ"/>
+              </a:rPr>
+              <a:t>地域密着の住宅会社。LINE広告の「友だち追加」でリフォーム代金オフクーポンを配布し、県内50代以上の女性に配信。</a:t>
+            </a:r>
+          </a:p>
+        </p:txBody>
+      </p:sp>
+      <p:sp>
+        <p:nvSpPr>
+          <p:cNvPr id="52" name="Rounded Rectangle 51"/>
+          <p:cNvSpPr/>
+          <p:nvPr/>
+        </p:nvSpPr>
+        <p:spPr>
+          <a:xfrm>
+            <a:off x="5223599" y="4752000"/>
+            <a:ext cx="1300800" cy="540000"/>
+          </a:xfrm>
+          <a:prstGeom prst="roundRect">
+            <a:avLst>
+              <a:gd name="adj" fmla="val 10000"/>
+            </a:avLst>
+          </a:prstGeom>
+          <a:solidFill>
+            <a:srgbClr val="F4F7FF"/>
+          </a:solidFill>
+          <a:ln>
+            <a:noFill/>
+          </a:ln>
+          <a:effectLst/>
+        </p:spPr>
+        <p:style>
+          <a:lnRef idx="1">
+            <a:schemeClr val="accent1"/>
+          </a:lnRef>
+          <a:fillRef idx="3">
+            <a:schemeClr val="accent1"/>
+          </a:fillRef>
+          <a:effectRef idx="2">
+            <a:schemeClr val="accent1"/>
+          </a:effectRef>
+          <a:fontRef idx="minor">
+            <a:schemeClr val="lt1"/>
+          </a:fontRef>
+        </p:style>
+        <p:txBody>
+          <a:bodyPr rtlCol="0" anchor="ctr"/>
+          <a:lstStyle/>
+          <a:p>
+            <a:pPr algn="ctr"/>
+            <a:endParaRPr>
+              <a:latin typeface="メイリオ"/>
+              <a:ea typeface="メイリオ"/>
+              <a:cs typeface="メイリオ"/>
+            </a:endParaRPr>
+          </a:p>
+        </p:txBody>
+      </p:sp>
+      <p:sp>
+        <p:nvSpPr>
+          <p:cNvPr id="53" name="TextBox 52"/>
+          <p:cNvSpPr txBox="1"/>
+          <p:nvPr/>
+        </p:nvSpPr>
+        <p:spPr>
+          <a:xfrm>
+            <a:off x="5259599" y="4806000"/>
+            <a:ext cx="1228800" cy="180000"/>
+          </a:xfrm>
+          <a:prstGeom prst="rect">
+            <a:avLst/>
+          </a:prstGeom>
+          <a:noFill/>
+        </p:spPr>
+        <p:txBody>
+          <a:bodyPr wrap="square" lIns="21600" tIns="7200" rIns="21600" bIns="7200" anchor="t">
+            <a:spAutoFit/>
+          </a:bodyPr>
+          <a:lstStyle/>
+          <a:p>
+            <a:pPr algn="ctr"/>
+            <a:r>
+              <a:rPr sz="900" b="1">
+                <a:solidFill>
+                  <a:srgbClr val="7F7F7F"/>
+                </a:solidFill>
+                <a:latin typeface="メイリオ"/>
+                <a:ea typeface="メイリオ"/>
+                <a:cs typeface="メイリオ"/>
+              </a:rPr>
+              <a:t>友だち数</a:t>
+            </a:r>
+          </a:p>
+        </p:txBody>
+      </p:sp>
+      <p:sp>
+        <p:nvSpPr>
+          <p:cNvPr id="54" name="TextBox 53"/>
+          <p:cNvSpPr txBox="1"/>
+          <p:nvPr/>
+        </p:nvSpPr>
+        <p:spPr>
+          <a:xfrm>
+            <a:off x="5259599" y="4986000"/>
+            <a:ext cx="1228800" cy="270000"/>
+          </a:xfrm>
+          <a:prstGeom prst="rect">
+            <a:avLst/>
+          </a:prstGeom>
+          <a:noFill/>
+        </p:spPr>
+        <p:txBody>
+          <a:bodyPr wrap="square" lIns="21600" tIns="7200" rIns="21600" bIns="7200" anchor="t">
+            <a:spAutoFit/>
+          </a:bodyPr>
+          <a:lstStyle/>
+          <a:p>
+            <a:pPr algn="ctr"/>
+            <a:r>
+              <a:rPr sz="1150" b="1">
+                <a:solidFill>
+                  <a:srgbClr val="1F285A"/>
+                </a:solidFill>
+                <a:latin typeface="メイリオ"/>
+                <a:ea typeface="メイリオ"/>
+                <a:cs typeface="メイリオ"/>
+              </a:rPr>
+              <a:t>5倍に増加</a:t>
+            </a:r>
+          </a:p>
+        </p:txBody>
+      </p:sp>
+      <p:sp>
+        <p:nvSpPr>
+          <p:cNvPr id="55" name="Rounded Rectangle 54"/>
+          <p:cNvSpPr/>
+          <p:nvPr/>
+        </p:nvSpPr>
+        <p:spPr>
+          <a:xfrm>
+            <a:off x="6560400" y="4752000"/>
+            <a:ext cx="1300800" cy="540000"/>
+          </a:xfrm>
+          <a:prstGeom prst="roundRect">
+            <a:avLst>
+              <a:gd name="adj" fmla="val 10000"/>
+            </a:avLst>
+          </a:prstGeom>
+          <a:solidFill>
+            <a:srgbClr val="F4F7FF"/>
+          </a:solidFill>
+          <a:ln>
+            <a:noFill/>
+          </a:ln>
+          <a:effectLst/>
+        </p:spPr>
+        <p:style>
+          <a:lnRef idx="1">
+            <a:schemeClr val="accent1"/>
+          </a:lnRef>
+          <a:fillRef idx="3">
+            <a:schemeClr val="accent1"/>
+          </a:fillRef>
+          <a:effectRef idx="2">
+            <a:schemeClr val="accent1"/>
+          </a:effectRef>
+          <a:fontRef idx="minor">
+            <a:schemeClr val="lt1"/>
+          </a:fontRef>
+        </p:style>
+        <p:txBody>
+          <a:bodyPr rtlCol="0" anchor="ctr"/>
+          <a:lstStyle/>
+          <a:p>
+            <a:pPr algn="ctr"/>
+            <a:endParaRPr>
+              <a:latin typeface="メイリオ"/>
+              <a:ea typeface="メイリオ"/>
+              <a:cs typeface="メイリオ"/>
+            </a:endParaRPr>
+          </a:p>
+        </p:txBody>
+      </p:sp>
+      <p:sp>
+        <p:nvSpPr>
+          <p:cNvPr id="56" name="TextBox 55"/>
+          <p:cNvSpPr txBox="1"/>
+          <p:nvPr/>
+        </p:nvSpPr>
+        <p:spPr>
+          <a:xfrm>
+            <a:off x="6596400" y="4806000"/>
+            <a:ext cx="1228800" cy="180000"/>
+          </a:xfrm>
+          <a:prstGeom prst="rect">
+            <a:avLst/>
+          </a:prstGeom>
+          <a:noFill/>
+        </p:spPr>
+        <p:txBody>
+          <a:bodyPr wrap="square" lIns="21600" tIns="7200" rIns="21600" bIns="7200" anchor="t">
+            <a:spAutoFit/>
+          </a:bodyPr>
+          <a:lstStyle/>
+          <a:p>
+            <a:pPr algn="ctr"/>
+            <a:r>
+              <a:rPr sz="900" b="1">
+                <a:solidFill>
+                  <a:srgbClr val="7F7F7F"/>
+                </a:solidFill>
+                <a:latin typeface="メイリオ"/>
+                <a:ea typeface="メイリオ"/>
+                <a:cs typeface="メイリオ"/>
+              </a:rPr>
+              <a:t>開始</a:t>
+            </a:r>
+          </a:p>
+        </p:txBody>
+      </p:sp>
+      <p:sp>
+        <p:nvSpPr>
+          <p:cNvPr id="57" name="TextBox 56"/>
+          <p:cNvSpPr txBox="1"/>
+          <p:nvPr/>
+        </p:nvSpPr>
+        <p:spPr>
+          <a:xfrm>
+            <a:off x="6596400" y="4986000"/>
+            <a:ext cx="1228800" cy="270000"/>
+          </a:xfrm>
+          <a:prstGeom prst="rect">
+            <a:avLst/>
+          </a:prstGeom>
+          <a:noFill/>
+        </p:spPr>
+        <p:txBody>
+          <a:bodyPr wrap="square" lIns="21600" tIns="7200" rIns="21600" bIns="7200" anchor="t">
+            <a:spAutoFit/>
+          </a:bodyPr>
+          <a:lstStyle/>
+          <a:p>
+            <a:pPr algn="ctr"/>
+            <a:r>
+              <a:rPr sz="1150" b="1">
+                <a:solidFill>
+                  <a:srgbClr val="1F285A"/>
+                </a:solidFill>
+                <a:latin typeface="メイリオ"/>
+                <a:ea typeface="メイリオ"/>
+                <a:cs typeface="メイリオ"/>
+              </a:rPr>
+              <a:t>2020年12月〜</a:t>
+            </a:r>
+          </a:p>
+        </p:txBody>
+      </p:sp>
+      <p:sp>
+        <p:nvSpPr>
+          <p:cNvPr id="58" name="Rounded Rectangle 57"/>
+          <p:cNvSpPr/>
+          <p:nvPr/>
+        </p:nvSpPr>
+        <p:spPr>
+          <a:xfrm>
+            <a:off x="7897199" y="4752000"/>
+            <a:ext cx="1300800" cy="540000"/>
+          </a:xfrm>
+          <a:prstGeom prst="roundRect">
+            <a:avLst>
+              <a:gd name="adj" fmla="val 10000"/>
+            </a:avLst>
+          </a:prstGeom>
+          <a:solidFill>
+            <a:srgbClr val="F4F7FF"/>
+          </a:solidFill>
+          <a:ln>
+            <a:noFill/>
+          </a:ln>
+          <a:effectLst/>
+        </p:spPr>
+        <p:style>
+          <a:lnRef idx="1">
+            <a:schemeClr val="accent1"/>
+          </a:lnRef>
+          <a:fillRef idx="3">
+            <a:schemeClr val="accent1"/>
+          </a:fillRef>
+          <a:effectRef idx="2">
+            <a:schemeClr val="accent1"/>
+          </a:effectRef>
+          <a:fontRef idx="minor">
+            <a:schemeClr val="lt1"/>
+          </a:fontRef>
+        </p:style>
+        <p:txBody>
+          <a:bodyPr rtlCol="0" anchor="ctr"/>
+          <a:lstStyle/>
+          <a:p>
+            <a:pPr algn="ctr"/>
+            <a:endParaRPr>
+              <a:latin typeface="メイリオ"/>
+              <a:ea typeface="メイリオ"/>
+              <a:cs typeface="メイリオ"/>
+            </a:endParaRPr>
+          </a:p>
+        </p:txBody>
+      </p:sp>
+      <p:sp>
+        <p:nvSpPr>
+          <p:cNvPr id="59" name="TextBox 58"/>
+          <p:cNvSpPr txBox="1"/>
+          <p:nvPr/>
+        </p:nvSpPr>
+        <p:spPr>
+          <a:xfrm>
+            <a:off x="7933199" y="4806000"/>
+            <a:ext cx="1228800" cy="180000"/>
+          </a:xfrm>
+          <a:prstGeom prst="rect">
+            <a:avLst/>
+          </a:prstGeom>
+          <a:noFill/>
+        </p:spPr>
+        <p:txBody>
+          <a:bodyPr wrap="square" lIns="21600" tIns="7200" rIns="21600" bIns="7200" anchor="t">
+            <a:spAutoFit/>
+          </a:bodyPr>
+          <a:lstStyle/>
+          <a:p>
+            <a:pPr algn="ctr"/>
+            <a:r>
+              <a:rPr sz="900" b="1">
+                <a:solidFill>
+                  <a:srgbClr val="7F7F7F"/>
+                </a:solidFill>
+                <a:latin typeface="メイリオ"/>
+                <a:ea typeface="メイリオ"/>
+                <a:cs typeface="メイリオ"/>
+              </a:rPr>
+              <a:t>対象</a:t>
+            </a:r>
+          </a:p>
+        </p:txBody>
+      </p:sp>
+      <p:sp>
+        <p:nvSpPr>
+          <p:cNvPr id="60" name="TextBox 59"/>
+          <p:cNvSpPr txBox="1"/>
+          <p:nvPr/>
+        </p:nvSpPr>
+        <p:spPr>
+          <a:xfrm>
+            <a:off x="7933199" y="4986000"/>
+            <a:ext cx="1228800" cy="270000"/>
+          </a:xfrm>
+          <a:prstGeom prst="rect">
+            <a:avLst/>
+          </a:prstGeom>
+          <a:noFill/>
+        </p:spPr>
+        <p:txBody>
+          <a:bodyPr wrap="square" lIns="21600" tIns="7200" rIns="21600" bIns="7200" anchor="t">
+            <a:spAutoFit/>
+          </a:bodyPr>
+          <a:lstStyle/>
+          <a:p>
+            <a:pPr algn="ctr"/>
+            <a:r>
+              <a:rPr sz="1150" b="1">
+                <a:solidFill>
+                  <a:srgbClr val="1F285A"/>
+                </a:solidFill>
+                <a:latin typeface="メイリオ"/>
+                <a:ea typeface="メイリオ"/>
+                <a:cs typeface="メイリオ"/>
+              </a:rPr>
+              <a:t>新潟県内</a:t>
+            </a:r>
+          </a:p>
+        </p:txBody>
+      </p:sp>
+      <p:sp>
+        <p:nvSpPr>
+          <p:cNvPr id="63" name="TextBox 62"/>
+          <p:cNvSpPr txBox="1"/>
+          <p:nvPr/>
+        </p:nvSpPr>
+        <p:spPr>
+          <a:xfrm>
+            <a:off x="547200" y="6246000"/>
+            <a:ext cx="8812800" cy="432000"/>
+          </a:xfrm>
+          <a:prstGeom prst="rect">
+            <a:avLst/>
+          </a:prstGeom>
+          <a:noFill/>
+        </p:spPr>
+        <p:txBody>
+          <a:bodyPr wrap="square" lIns="21600" tIns="7200" rIns="21600" bIns="7200" anchor="t">
+            <a:spAutoFit/>
+          </a:bodyPr>
+          <a:lstStyle/>
+          <a:p>
+            <a:pPr algn="l"/>
+            <a:r>
+              <a:rPr sz="850" b="0">
+                <a:solidFill>
+                  <a:srgbClr val="7F7F7F"/>
+                </a:solidFill>
+                <a:latin typeface="メイリオ"/>
+                <a:ea typeface="メイリオ"/>
+                <a:cs typeface="メイリオ"/>
+              </a:rPr>
+              <a:t>※出典：LINEヤフー for Business 導入事例（lycbiz.com）／2026年10月19日確認。ミサワホーム北越は「その他業界の活用事例」ページに掲載。</a:t>
+            </a:r>
+          </a:p>
+        </p:txBody>
+      </p:sp>
+    </p:spTree>
+  </p:cSld>
+  <p:clrMapOvr>
+    <a:masterClrMapping/>
+  </p:clrMapOvr>
 </p:sld>
 </file>
 
